--- a/Machine Learning Training.pptx
+++ b/Machine Learning Training.pptx
@@ -16,8 +16,8 @@
     <p:sldId id="271" r:id="rId10"/>
     <p:sldId id="273" r:id="rId11"/>
     <p:sldId id="274" r:id="rId12"/>
-    <p:sldId id="275" r:id="rId13"/>
-    <p:sldId id="281" r:id="rId14"/>
+    <p:sldId id="281" r:id="rId13"/>
+    <p:sldId id="275" r:id="rId14"/>
     <p:sldId id="276" r:id="rId15"/>
     <p:sldId id="277" r:id="rId16"/>
     <p:sldId id="278" r:id="rId17"/>
@@ -25,6 +25,15 @@
     <p:sldId id="280" r:id="rId19"/>
     <p:sldId id="265" r:id="rId20"/>
     <p:sldId id="266" r:id="rId21"/>
+    <p:sldId id="282" r:id="rId22"/>
+    <p:sldId id="284" r:id="rId23"/>
+    <p:sldId id="283" r:id="rId24"/>
+    <p:sldId id="285" r:id="rId25"/>
+    <p:sldId id="286" r:id="rId26"/>
+    <p:sldId id="287" r:id="rId27"/>
+    <p:sldId id="288" r:id="rId28"/>
+    <p:sldId id="289" r:id="rId29"/>
+    <p:sldId id="290" r:id="rId30"/>
   </p:sldIdLst>
   <p:sldSz cx="12192000" cy="6858000"/>
   <p:notesSz cx="6858000" cy="9144000"/>
@@ -5902,10 +5911,10 @@
       </p:grpSpPr>
       <p:pic>
         <p:nvPicPr>
-          <p:cNvPr id="5" name="Picture 4" descr="A diagram of a small spam filter&#10;&#10;AI-generated content may be incorrect.">
+          <p:cNvPr id="3" name="Picture 2" descr="Screens screenshot of a weather app&#10;&#10;AI-generated content may be incorrect.">
             <a:extLst>
               <a:ext uri="{FF2B5EF4-FFF2-40B4-BE49-F238E27FC236}">
-                <a16:creationId xmlns:a16="http://schemas.microsoft.com/office/drawing/2014/main" id="{91A3F66E-A3C7-5D7D-1893-5B12C5E245DF}"/>
+                <a16:creationId xmlns:a16="http://schemas.microsoft.com/office/drawing/2014/main" id="{232C9207-C6EC-9D8F-43A8-7A5113245911}"/>
               </a:ext>
             </a:extLst>
           </p:cNvPr>
@@ -5922,38 +5931,8 @@
         </p:blipFill>
         <p:spPr>
           <a:xfrm>
-            <a:off x="6444499" y="1993638"/>
-            <a:ext cx="5291666" cy="2738436"/>
-          </a:xfrm>
-          <a:prstGeom prst="rect">
-            <a:avLst/>
-          </a:prstGeom>
-        </p:spPr>
-      </p:pic>
-      <p:pic>
-        <p:nvPicPr>
-          <p:cNvPr id="3" name="Picture 2" descr="Screens screenshot of a weather app&#10;&#10;AI-generated content may be incorrect.">
-            <a:extLst>
-              <a:ext uri="{FF2B5EF4-FFF2-40B4-BE49-F238E27FC236}">
-                <a16:creationId xmlns:a16="http://schemas.microsoft.com/office/drawing/2014/main" id="{232C9207-C6EC-9D8F-43A8-7A5113245911}"/>
-              </a:ext>
-            </a:extLst>
-          </p:cNvPr>
-          <p:cNvPicPr>
-            <a:picLocks noChangeAspect="1"/>
-          </p:cNvPicPr>
-          <p:nvPr/>
-        </p:nvPicPr>
-        <p:blipFill>
-          <a:blip r:embed="rId3"/>
-          <a:stretch>
-            <a:fillRect/>
-          </a:stretch>
-        </p:blipFill>
-        <p:spPr>
-          <a:xfrm>
-            <a:off x="455835" y="2059782"/>
-            <a:ext cx="5291667" cy="2672292"/>
+            <a:off x="1863885" y="1236306"/>
+            <a:ext cx="8464230" cy="4385388"/>
           </a:xfrm>
           <a:prstGeom prst="rect">
             <a:avLst/>
@@ -5974,74 +5953,6 @@
 </file>
 
 <file path=ppt/slides/slide12.xml><?xml version="1.0" encoding="utf-8"?>
-<p:sld xmlns:a="http://schemas.openxmlformats.org/drawingml/2006/main" xmlns:r="http://schemas.openxmlformats.org/officeDocument/2006/relationships" xmlns:p="http://schemas.openxmlformats.org/presentationml/2006/main">
-  <p:cSld>
-    <p:bg>
-      <p:bgPr>
-        <a:solidFill>
-          <a:schemeClr val="bg1"/>
-        </a:solidFill>
-        <a:effectLst/>
-      </p:bgPr>
-    </p:bg>
-    <p:spTree>
-      <p:nvGrpSpPr>
-        <p:cNvPr id="1" name=""/>
-        <p:cNvGrpSpPr/>
-        <p:nvPr/>
-      </p:nvGrpSpPr>
-      <p:grpSpPr>
-        <a:xfrm>
-          <a:off x="0" y="0"/>
-          <a:ext cx="0" cy="0"/>
-          <a:chOff x="0" y="0"/>
-          <a:chExt cx="0" cy="0"/>
-        </a:xfrm>
-      </p:grpSpPr>
-      <p:pic>
-        <p:nvPicPr>
-          <p:cNvPr id="3" name="Picture 2">
-            <a:extLst>
-              <a:ext uri="{FF2B5EF4-FFF2-40B4-BE49-F238E27FC236}">
-                <a16:creationId xmlns:a16="http://schemas.microsoft.com/office/drawing/2014/main" id="{76A1E54E-434F-CAFD-065A-868C9DBB3374}"/>
-              </a:ext>
-            </a:extLst>
-          </p:cNvPr>
-          <p:cNvPicPr>
-            <a:picLocks noChangeAspect="1"/>
-          </p:cNvPicPr>
-          <p:nvPr/>
-        </p:nvPicPr>
-        <p:blipFill>
-          <a:blip r:embed="rId2"/>
-          <a:stretch>
-            <a:fillRect/>
-          </a:stretch>
-        </p:blipFill>
-        <p:spPr>
-          <a:xfrm>
-            <a:off x="961375" y="653298"/>
-            <a:ext cx="10269250" cy="5571067"/>
-          </a:xfrm>
-          <a:prstGeom prst="rect">
-            <a:avLst/>
-          </a:prstGeom>
-        </p:spPr>
-      </p:pic>
-    </p:spTree>
-    <p:extLst>
-      <p:ext uri="{BB962C8B-B14F-4D97-AF65-F5344CB8AC3E}">
-        <p14:creationId xmlns:p14="http://schemas.microsoft.com/office/powerpoint/2010/main" val="734031434"/>
-      </p:ext>
-    </p:extLst>
-  </p:cSld>
-  <p:clrMapOvr>
-    <a:masterClrMapping/>
-  </p:clrMapOvr>
-</p:sld>
-</file>
-
-<file path=ppt/slides/slide13.xml><?xml version="1.0" encoding="utf-8"?>
 <p:sld xmlns:a="http://schemas.openxmlformats.org/drawingml/2006/main" xmlns:r="http://schemas.openxmlformats.org/officeDocument/2006/relationships" xmlns:p="http://schemas.openxmlformats.org/presentationml/2006/main">
   <p:cSld>
     <p:bg>
@@ -8529,6 +8440,74 @@
 </p:sld>
 </file>
 
+<file path=ppt/slides/slide13.xml><?xml version="1.0" encoding="utf-8"?>
+<p:sld xmlns:a="http://schemas.openxmlformats.org/drawingml/2006/main" xmlns:r="http://schemas.openxmlformats.org/officeDocument/2006/relationships" xmlns:p="http://schemas.openxmlformats.org/presentationml/2006/main">
+  <p:cSld>
+    <p:bg>
+      <p:bgPr>
+        <a:solidFill>
+          <a:schemeClr val="bg1"/>
+        </a:solidFill>
+        <a:effectLst/>
+      </p:bgPr>
+    </p:bg>
+    <p:spTree>
+      <p:nvGrpSpPr>
+        <p:cNvPr id="1" name=""/>
+        <p:cNvGrpSpPr/>
+        <p:nvPr/>
+      </p:nvGrpSpPr>
+      <p:grpSpPr>
+        <a:xfrm>
+          <a:off x="0" y="0"/>
+          <a:ext cx="0" cy="0"/>
+          <a:chOff x="0" y="0"/>
+          <a:chExt cx="0" cy="0"/>
+        </a:xfrm>
+      </p:grpSpPr>
+      <p:pic>
+        <p:nvPicPr>
+          <p:cNvPr id="3" name="Picture 2">
+            <a:extLst>
+              <a:ext uri="{FF2B5EF4-FFF2-40B4-BE49-F238E27FC236}">
+                <a16:creationId xmlns:a16="http://schemas.microsoft.com/office/drawing/2014/main" id="{76A1E54E-434F-CAFD-065A-868C9DBB3374}"/>
+              </a:ext>
+            </a:extLst>
+          </p:cNvPr>
+          <p:cNvPicPr>
+            <a:picLocks noChangeAspect="1"/>
+          </p:cNvPicPr>
+          <p:nvPr/>
+        </p:nvPicPr>
+        <p:blipFill>
+          <a:blip r:embed="rId2"/>
+          <a:stretch>
+            <a:fillRect/>
+          </a:stretch>
+        </p:blipFill>
+        <p:spPr>
+          <a:xfrm>
+            <a:off x="961375" y="653298"/>
+            <a:ext cx="10269250" cy="5571067"/>
+          </a:xfrm>
+          <a:prstGeom prst="rect">
+            <a:avLst/>
+          </a:prstGeom>
+        </p:spPr>
+      </p:pic>
+    </p:spTree>
+    <p:extLst>
+      <p:ext uri="{BB962C8B-B14F-4D97-AF65-F5344CB8AC3E}">
+        <p14:creationId xmlns:p14="http://schemas.microsoft.com/office/powerpoint/2010/main" val="734031434"/>
+      </p:ext>
+    </p:extLst>
+  </p:cSld>
+  <p:clrMapOvr>
+    <a:masterClrMapping/>
+  </p:clrMapOvr>
+</p:sld>
+</file>
+
 <file path=ppt/slides/slide14.xml><?xml version="1.0" encoding="utf-8"?>
 <p:sld xmlns:a="http://schemas.openxmlformats.org/drawingml/2006/main" xmlns:r="http://schemas.openxmlformats.org/officeDocument/2006/relationships" xmlns:p="http://schemas.openxmlformats.org/presentationml/2006/main">
   <p:cSld>
@@ -8688,7 +8667,7 @@
         </p:blipFill>
         <p:spPr>
           <a:xfrm>
-            <a:off x="1475730" y="975970"/>
+            <a:off x="1475730" y="985301"/>
             <a:ext cx="9240540" cy="4906060"/>
           </a:xfrm>
           <a:prstGeom prst="rect">
@@ -11300,6 +11279,14 @@
 <file path=ppt/slides/slide20.xml><?xml version="1.0" encoding="utf-8"?>
 <p:sld xmlns:a="http://schemas.openxmlformats.org/drawingml/2006/main" xmlns:r="http://schemas.openxmlformats.org/officeDocument/2006/relationships" xmlns:p="http://schemas.openxmlformats.org/presentationml/2006/main">
   <p:cSld>
+    <p:bg>
+      <p:bgPr>
+        <a:solidFill>
+          <a:schemeClr val="bg1"/>
+        </a:solidFill>
+        <a:effectLst/>
+      </p:bgPr>
+    </p:bg>
     <p:spTree>
       <p:nvGrpSpPr>
         <p:cNvPr id="1" name=""/>
@@ -11314,10 +11301,1140 @@
           <a:chExt cx="0" cy="0"/>
         </a:xfrm>
       </p:grpSpPr>
+      <p:sp>
+        <p:nvSpPr>
+          <p:cNvPr id="8" name="Rectangle 7">
+            <a:extLst>
+              <a:ext uri="{FF2B5EF4-FFF2-40B4-BE49-F238E27FC236}">
+                <a16:creationId xmlns:a16="http://schemas.microsoft.com/office/drawing/2014/main" id="{F3060C83-F051-4F0E-ABAD-AA0DFC48B218}"/>
+              </a:ext>
+              <a:ext uri="{C183D7F6-B498-43B3-948B-1728B52AA6E4}">
+                <adec:decorative xmlns:adec="http://schemas.microsoft.com/office/drawing/2017/decorative" val="1"/>
+              </a:ext>
+            </a:extLst>
+          </p:cNvPr>
+          <p:cNvSpPr>
+            <a:spLocks noGrp="1" noRot="1" noChangeAspect="1" noMove="1" noResize="1" noEditPoints="1" noAdjustHandles="1" noChangeArrowheads="1" noChangeShapeType="1" noTextEdit="1"/>
+          </p:cNvSpPr>
+          <p:nvPr>
+            <p:extLst>
+              <p:ext uri="{386F3935-93C4-4BCD-93E2-E3B085C9AB24}">
+                <p16:designElem xmlns:p16="http://schemas.microsoft.com/office/powerpoint/2015/main" val="1"/>
+              </p:ext>
+            </p:extLst>
+          </p:nvPr>
+        </p:nvSpPr>
+        <p:spPr>
+          <a:xfrm>
+            <a:off x="0" y="0"/>
+            <a:ext cx="12192000" cy="6858000"/>
+          </a:xfrm>
+          <a:prstGeom prst="rect">
+            <a:avLst/>
+          </a:prstGeom>
+          <a:solidFill>
+            <a:schemeClr val="bg1"/>
+          </a:solidFill>
+          <a:ln>
+            <a:noFill/>
+          </a:ln>
+        </p:spPr>
+        <p:style>
+          <a:lnRef idx="2">
+            <a:schemeClr val="accent1">
+              <a:shade val="50000"/>
+            </a:schemeClr>
+          </a:lnRef>
+          <a:fillRef idx="1">
+            <a:schemeClr val="accent1"/>
+          </a:fillRef>
+          <a:effectRef idx="0">
+            <a:schemeClr val="accent1"/>
+          </a:effectRef>
+          <a:fontRef idx="minor">
+            <a:schemeClr val="lt1"/>
+          </a:fontRef>
+        </p:style>
+        <p:txBody>
+          <a:bodyPr rtlCol="0" anchor="ctr"/>
+          <a:lstStyle/>
+          <a:p>
+            <a:pPr algn="ctr"/>
+            <a:endParaRPr lang="en-US" dirty="0"/>
+          </a:p>
+        </p:txBody>
+      </p:sp>
+      <p:sp>
+        <p:nvSpPr>
+          <p:cNvPr id="10" name="Freeform: Shape 9">
+            <a:extLst>
+              <a:ext uri="{FF2B5EF4-FFF2-40B4-BE49-F238E27FC236}">
+                <a16:creationId xmlns:a16="http://schemas.microsoft.com/office/drawing/2014/main" id="{83C98ABE-055B-441F-B07E-44F97F083C39}"/>
+              </a:ext>
+              <a:ext uri="{C183D7F6-B498-43B3-948B-1728B52AA6E4}">
+                <adec:decorative xmlns:adec="http://schemas.microsoft.com/office/drawing/2017/decorative" val="1"/>
+              </a:ext>
+            </a:extLst>
+          </p:cNvPr>
+          <p:cNvSpPr>
+            <a:spLocks noGrp="1" noRot="1" noChangeAspect="1" noMove="1" noResize="1" noEditPoints="1" noAdjustHandles="1" noChangeArrowheads="1" noChangeShapeType="1" noTextEdit="1"/>
+          </p:cNvSpPr>
+          <p:nvPr>
+            <p:extLst>
+              <p:ext uri="{386F3935-93C4-4BCD-93E2-E3B085C9AB24}">
+                <p16:designElem xmlns:p16="http://schemas.microsoft.com/office/powerpoint/2015/main" val="1"/>
+              </p:ext>
+            </p:extLst>
+          </p:nvPr>
+        </p:nvSpPr>
+        <p:spPr>
+          <a:xfrm rot="18900000" flipH="1">
+            <a:off x="-376156" y="-253670"/>
+            <a:ext cx="1827638" cy="1376989"/>
+          </a:xfrm>
+          <a:custGeom>
+            <a:avLst/>
+            <a:gdLst>
+              <a:gd name="connsiteX0" fmla="*/ 0 w 1827638"/>
+              <a:gd name="connsiteY0" fmla="*/ 987379 h 1376989"/>
+              <a:gd name="connsiteX1" fmla="*/ 987379 w 1827638"/>
+              <a:gd name="connsiteY1" fmla="*/ 0 h 1376989"/>
+              <a:gd name="connsiteX2" fmla="*/ 1827638 w 1827638"/>
+              <a:gd name="connsiteY2" fmla="*/ 840260 h 1376989"/>
+              <a:gd name="connsiteX3" fmla="*/ 1827638 w 1827638"/>
+              <a:gd name="connsiteY3" fmla="*/ 1376989 h 1376989"/>
+              <a:gd name="connsiteX4" fmla="*/ 0 w 1827638"/>
+              <a:gd name="connsiteY4" fmla="*/ 1376989 h 1376989"/>
+            </a:gdLst>
+            <a:ahLst/>
+            <a:cxnLst>
+              <a:cxn ang="0">
+                <a:pos x="connsiteX0" y="connsiteY0"/>
+              </a:cxn>
+              <a:cxn ang="0">
+                <a:pos x="connsiteX1" y="connsiteY1"/>
+              </a:cxn>
+              <a:cxn ang="0">
+                <a:pos x="connsiteX2" y="connsiteY2"/>
+              </a:cxn>
+              <a:cxn ang="0">
+                <a:pos x="connsiteX3" y="connsiteY3"/>
+              </a:cxn>
+              <a:cxn ang="0">
+                <a:pos x="connsiteX4" y="connsiteY4"/>
+              </a:cxn>
+            </a:cxnLst>
+            <a:rect l="l" t="t" r="r" b="b"/>
+            <a:pathLst>
+              <a:path w="1827638" h="1376989">
+                <a:moveTo>
+                  <a:pt x="0" y="987379"/>
+                </a:moveTo>
+                <a:lnTo>
+                  <a:pt x="987379" y="0"/>
+                </a:lnTo>
+                <a:lnTo>
+                  <a:pt x="1827638" y="840260"/>
+                </a:lnTo>
+                <a:lnTo>
+                  <a:pt x="1827638" y="1376989"/>
+                </a:lnTo>
+                <a:lnTo>
+                  <a:pt x="0" y="1376989"/>
+                </a:lnTo>
+                <a:close/>
+              </a:path>
+            </a:pathLst>
+          </a:custGeom>
+          <a:solidFill>
+            <a:schemeClr val="accent1">
+              <a:alpha val="30000"/>
+            </a:schemeClr>
+          </a:solidFill>
+          <a:ln>
+            <a:noFill/>
+          </a:ln>
+        </p:spPr>
+        <p:style>
+          <a:lnRef idx="2">
+            <a:schemeClr val="accent1">
+              <a:shade val="50000"/>
+            </a:schemeClr>
+          </a:lnRef>
+          <a:fillRef idx="1">
+            <a:schemeClr val="accent1"/>
+          </a:fillRef>
+          <a:effectRef idx="0">
+            <a:schemeClr val="accent1"/>
+          </a:effectRef>
+          <a:fontRef idx="minor">
+            <a:schemeClr val="lt1"/>
+          </a:fontRef>
+        </p:style>
+        <p:txBody>
+          <a:bodyPr rtlCol="0" anchor="ctr"/>
+          <a:lstStyle/>
+          <a:p>
+            <a:pPr algn="ctr"/>
+            <a:endParaRPr lang="en-US" dirty="0"/>
+          </a:p>
+        </p:txBody>
+      </p:sp>
+      <p:sp>
+        <p:nvSpPr>
+          <p:cNvPr id="12" name="Rectangle 11">
+            <a:extLst>
+              <a:ext uri="{FF2B5EF4-FFF2-40B4-BE49-F238E27FC236}">
+                <a16:creationId xmlns:a16="http://schemas.microsoft.com/office/drawing/2014/main" id="{29FDB030-9B49-4CED-8CCD-4D99382388AC}"/>
+              </a:ext>
+              <a:ext uri="{C183D7F6-B498-43B3-948B-1728B52AA6E4}">
+                <adec:decorative xmlns:adec="http://schemas.microsoft.com/office/drawing/2017/decorative" val="1"/>
+              </a:ext>
+            </a:extLst>
+          </p:cNvPr>
+          <p:cNvSpPr>
+            <a:spLocks noGrp="1" noRot="1" noChangeAspect="1" noMove="1" noResize="1" noEditPoints="1" noAdjustHandles="1" noChangeArrowheads="1" noChangeShapeType="1" noTextEdit="1"/>
+          </p:cNvSpPr>
+          <p:nvPr>
+            <p:extLst>
+              <p:ext uri="{386F3935-93C4-4BCD-93E2-E3B085C9AB24}">
+                <p16:designElem xmlns:p16="http://schemas.microsoft.com/office/powerpoint/2015/main" val="1"/>
+              </p:ext>
+            </p:extLst>
+          </p:nvPr>
+        </p:nvSpPr>
+        <p:spPr>
+          <a:xfrm rot="18900000" flipH="1">
+            <a:off x="891641" y="422146"/>
+            <a:ext cx="645368" cy="645368"/>
+          </a:xfrm>
+          <a:prstGeom prst="rect">
+            <a:avLst/>
+          </a:prstGeom>
+          <a:solidFill>
+            <a:schemeClr val="accent1">
+              <a:alpha val="30000"/>
+            </a:schemeClr>
+          </a:solidFill>
+          <a:ln>
+            <a:noFill/>
+          </a:ln>
+        </p:spPr>
+        <p:style>
+          <a:lnRef idx="2">
+            <a:schemeClr val="accent1">
+              <a:shade val="50000"/>
+            </a:schemeClr>
+          </a:lnRef>
+          <a:fillRef idx="1">
+            <a:schemeClr val="accent1"/>
+          </a:fillRef>
+          <a:effectRef idx="0">
+            <a:schemeClr val="accent1"/>
+          </a:effectRef>
+          <a:fontRef idx="minor">
+            <a:schemeClr val="lt1"/>
+          </a:fontRef>
+        </p:style>
+        <p:txBody>
+          <a:bodyPr rtlCol="0" anchor="ctr"/>
+          <a:lstStyle/>
+          <a:p>
+            <a:pPr algn="ctr"/>
+            <a:endParaRPr lang="en-US"/>
+          </a:p>
+        </p:txBody>
+      </p:sp>
+      <p:sp>
+        <p:nvSpPr>
+          <p:cNvPr id="14" name="Rectangle 13">
+            <a:extLst>
+              <a:ext uri="{FF2B5EF4-FFF2-40B4-BE49-F238E27FC236}">
+                <a16:creationId xmlns:a16="http://schemas.microsoft.com/office/drawing/2014/main" id="{3783CA14-24A1-485C-8B30-D6A5D87987AD}"/>
+              </a:ext>
+              <a:ext uri="{C183D7F6-B498-43B3-948B-1728B52AA6E4}">
+                <adec:decorative xmlns:adec="http://schemas.microsoft.com/office/drawing/2017/decorative" val="1"/>
+              </a:ext>
+            </a:extLst>
+          </p:cNvPr>
+          <p:cNvSpPr>
+            <a:spLocks noGrp="1" noRot="1" noChangeAspect="1" noMove="1" noResize="1" noEditPoints="1" noAdjustHandles="1" noChangeArrowheads="1" noChangeShapeType="1" noTextEdit="1"/>
+          </p:cNvSpPr>
+          <p:nvPr>
+            <p:extLst>
+              <p:ext uri="{386F3935-93C4-4BCD-93E2-E3B085C9AB24}">
+                <p16:designElem xmlns:p16="http://schemas.microsoft.com/office/powerpoint/2015/main" val="1"/>
+              </p:ext>
+            </p:extLst>
+          </p:nvPr>
+        </p:nvSpPr>
+        <p:spPr>
+          <a:xfrm rot="18900000" flipH="1">
+            <a:off x="10043482" y="655140"/>
+            <a:ext cx="687472" cy="687472"/>
+          </a:xfrm>
+          <a:prstGeom prst="rect">
+            <a:avLst/>
+          </a:prstGeom>
+          <a:solidFill>
+            <a:schemeClr val="accent4">
+              <a:alpha val="30000"/>
+            </a:schemeClr>
+          </a:solidFill>
+          <a:ln>
+            <a:noFill/>
+          </a:ln>
+        </p:spPr>
+        <p:style>
+          <a:lnRef idx="2">
+            <a:schemeClr val="accent1">
+              <a:shade val="50000"/>
+            </a:schemeClr>
+          </a:lnRef>
+          <a:fillRef idx="1">
+            <a:schemeClr val="accent1"/>
+          </a:fillRef>
+          <a:effectRef idx="0">
+            <a:schemeClr val="accent1"/>
+          </a:effectRef>
+          <a:fontRef idx="minor">
+            <a:schemeClr val="lt1"/>
+          </a:fontRef>
+        </p:style>
+        <p:txBody>
+          <a:bodyPr rtlCol="0" anchor="ctr"/>
+          <a:lstStyle/>
+          <a:p>
+            <a:pPr algn="ctr"/>
+            <a:endParaRPr lang="en-US"/>
+          </a:p>
+        </p:txBody>
+      </p:sp>
+      <p:sp>
+        <p:nvSpPr>
+          <p:cNvPr id="16" name="Freeform: Shape 15">
+            <a:extLst>
+              <a:ext uri="{FF2B5EF4-FFF2-40B4-BE49-F238E27FC236}">
+                <a16:creationId xmlns:a16="http://schemas.microsoft.com/office/drawing/2014/main" id="{9A97C86A-04D6-40F7-AE84-31AB43E6A846}"/>
+              </a:ext>
+              <a:ext uri="{C183D7F6-B498-43B3-948B-1728B52AA6E4}">
+                <adec:decorative xmlns:adec="http://schemas.microsoft.com/office/drawing/2017/decorative" val="1"/>
+              </a:ext>
+            </a:extLst>
+          </p:cNvPr>
+          <p:cNvSpPr>
+            <a:spLocks noGrp="1" noRot="1" noChangeAspect="1" noMove="1" noResize="1" noEditPoints="1" noAdjustHandles="1" noChangeArrowheads="1" noChangeShapeType="1" noTextEdit="1"/>
+          </p:cNvSpPr>
+          <p:nvPr>
+            <p:extLst>
+              <p:ext uri="{386F3935-93C4-4BCD-93E2-E3B085C9AB24}">
+                <p16:designElem xmlns:p16="http://schemas.microsoft.com/office/powerpoint/2015/main" val="1"/>
+              </p:ext>
+            </p:extLst>
+          </p:nvPr>
+        </p:nvSpPr>
+        <p:spPr>
+          <a:xfrm rot="10800000" flipH="1">
+            <a:off x="9356643" y="0"/>
+            <a:ext cx="2835357" cy="1480837"/>
+          </a:xfrm>
+          <a:custGeom>
+            <a:avLst/>
+            <a:gdLst>
+              <a:gd name="connsiteX0" fmla="*/ 2835357 w 2835357"/>
+              <a:gd name="connsiteY0" fmla="*/ 1480837 h 1480837"/>
+              <a:gd name="connsiteX1" fmla="*/ 0 w 2835357"/>
+              <a:gd name="connsiteY1" fmla="*/ 1480837 h 1480837"/>
+              <a:gd name="connsiteX2" fmla="*/ 1552727 w 2835357"/>
+              <a:gd name="connsiteY2" fmla="*/ 0 h 1480837"/>
+              <a:gd name="connsiteX3" fmla="*/ 2835357 w 2835357"/>
+              <a:gd name="connsiteY3" fmla="*/ 1223245 h 1480837"/>
+            </a:gdLst>
+            <a:ahLst/>
+            <a:cxnLst>
+              <a:cxn ang="0">
+                <a:pos x="connsiteX0" y="connsiteY0"/>
+              </a:cxn>
+              <a:cxn ang="0">
+                <a:pos x="connsiteX1" y="connsiteY1"/>
+              </a:cxn>
+              <a:cxn ang="0">
+                <a:pos x="connsiteX2" y="connsiteY2"/>
+              </a:cxn>
+              <a:cxn ang="0">
+                <a:pos x="connsiteX3" y="connsiteY3"/>
+              </a:cxn>
+            </a:cxnLst>
+            <a:rect l="l" t="t" r="r" b="b"/>
+            <a:pathLst>
+              <a:path w="2835357" h="1480837">
+                <a:moveTo>
+                  <a:pt x="2835357" y="1480837"/>
+                </a:moveTo>
+                <a:lnTo>
+                  <a:pt x="0" y="1480837"/>
+                </a:lnTo>
+                <a:lnTo>
+                  <a:pt x="1552727" y="0"/>
+                </a:lnTo>
+                <a:lnTo>
+                  <a:pt x="2835357" y="1223245"/>
+                </a:lnTo>
+                <a:close/>
+              </a:path>
+            </a:pathLst>
+          </a:custGeom>
+          <a:solidFill>
+            <a:schemeClr val="accent4">
+              <a:alpha val="30000"/>
+            </a:schemeClr>
+          </a:solidFill>
+          <a:ln>
+            <a:noFill/>
+          </a:ln>
+        </p:spPr>
+        <p:style>
+          <a:lnRef idx="2">
+            <a:schemeClr val="accent1">
+              <a:shade val="50000"/>
+            </a:schemeClr>
+          </a:lnRef>
+          <a:fillRef idx="1">
+            <a:schemeClr val="accent1"/>
+          </a:fillRef>
+          <a:effectRef idx="0">
+            <a:schemeClr val="accent1"/>
+          </a:effectRef>
+          <a:fontRef idx="minor">
+            <a:schemeClr val="lt1"/>
+          </a:fontRef>
+        </p:style>
+        <p:txBody>
+          <a:bodyPr wrap="square" rtlCol="0" anchor="ctr">
+            <a:noAutofit/>
+          </a:bodyPr>
+          <a:lstStyle/>
+          <a:p>
+            <a:pPr algn="ctr"/>
+            <a:endParaRPr lang="en-US" dirty="0"/>
+          </a:p>
+        </p:txBody>
+      </p:sp>
+      <p:sp>
+        <p:nvSpPr>
+          <p:cNvPr id="18" name="Isosceles Triangle 17">
+            <a:extLst>
+              <a:ext uri="{FF2B5EF4-FFF2-40B4-BE49-F238E27FC236}">
+                <a16:creationId xmlns:a16="http://schemas.microsoft.com/office/drawing/2014/main" id="{FF9F2414-84E8-453E-B1F3-389FDE8192D9}"/>
+              </a:ext>
+              <a:ext uri="{C183D7F6-B498-43B3-948B-1728B52AA6E4}">
+                <adec:decorative xmlns:adec="http://schemas.microsoft.com/office/drawing/2017/decorative" val="1"/>
+              </a:ext>
+            </a:extLst>
+          </p:cNvPr>
+          <p:cNvSpPr>
+            <a:spLocks noGrp="1" noRot="1" noChangeAspect="1" noMove="1" noResize="1" noEditPoints="1" noAdjustHandles="1" noChangeArrowheads="1" noChangeShapeType="1" noTextEdit="1"/>
+          </p:cNvSpPr>
+          <p:nvPr>
+            <p:extLst>
+              <p:ext uri="{386F3935-93C4-4BCD-93E2-E3B085C9AB24}">
+                <p16:designElem xmlns:p16="http://schemas.microsoft.com/office/powerpoint/2015/main" val="1"/>
+              </p:ext>
+            </p:extLst>
+          </p:nvPr>
+        </p:nvSpPr>
+        <p:spPr>
+          <a:xfrm flipH="1">
+            <a:off x="7976344" y="6115501"/>
+            <a:ext cx="1494513" cy="742499"/>
+          </a:xfrm>
+          <a:prstGeom prst="triangle">
+            <a:avLst/>
+          </a:prstGeom>
+          <a:solidFill>
+            <a:schemeClr val="accent1">
+              <a:alpha val="30000"/>
+            </a:schemeClr>
+          </a:solidFill>
+          <a:ln>
+            <a:noFill/>
+          </a:ln>
+        </p:spPr>
+        <p:style>
+          <a:lnRef idx="2">
+            <a:schemeClr val="accent1">
+              <a:shade val="50000"/>
+            </a:schemeClr>
+          </a:lnRef>
+          <a:fillRef idx="1">
+            <a:schemeClr val="accent1"/>
+          </a:fillRef>
+          <a:effectRef idx="0">
+            <a:schemeClr val="accent1"/>
+          </a:effectRef>
+          <a:fontRef idx="minor">
+            <a:schemeClr val="lt1"/>
+          </a:fontRef>
+        </p:style>
+        <p:txBody>
+          <a:bodyPr rtlCol="0" anchor="ctr"/>
+          <a:lstStyle/>
+          <a:p>
+            <a:pPr algn="ctr"/>
+            <a:endParaRPr lang="en-US"/>
+          </a:p>
+        </p:txBody>
+      </p:sp>
+      <p:pic>
+        <p:nvPicPr>
+          <p:cNvPr id="3" name="Picture 2">
+            <a:extLst>
+              <a:ext uri="{FF2B5EF4-FFF2-40B4-BE49-F238E27FC236}">
+                <a16:creationId xmlns:a16="http://schemas.microsoft.com/office/drawing/2014/main" id="{31F33E0E-3130-B579-C064-F967C4D97605}"/>
+              </a:ext>
+            </a:extLst>
+          </p:cNvPr>
+          <p:cNvPicPr>
+            <a:picLocks noChangeAspect="1"/>
+          </p:cNvPicPr>
+          <p:nvPr/>
+        </p:nvPicPr>
+        <p:blipFill>
+          <a:blip r:embed="rId2"/>
+          <a:stretch>
+            <a:fillRect/>
+          </a:stretch>
+        </p:blipFill>
+        <p:spPr>
+          <a:xfrm>
+            <a:off x="1209100" y="643467"/>
+            <a:ext cx="9773799" cy="5571065"/>
+          </a:xfrm>
+          <a:prstGeom prst="rect">
+            <a:avLst/>
+          </a:prstGeom>
+          <a:ln>
+            <a:noFill/>
+          </a:ln>
+        </p:spPr>
+      </p:pic>
+      <p:sp>
+        <p:nvSpPr>
+          <p:cNvPr id="20" name="Isosceles Triangle 19">
+            <a:extLst>
+              <a:ext uri="{FF2B5EF4-FFF2-40B4-BE49-F238E27FC236}">
+                <a16:creationId xmlns:a16="http://schemas.microsoft.com/office/drawing/2014/main" id="{3ECA69A1-7536-43AC-85EF-C7106179F5ED}"/>
+              </a:ext>
+              <a:ext uri="{C183D7F6-B498-43B3-948B-1728B52AA6E4}">
+                <adec:decorative xmlns:adec="http://schemas.microsoft.com/office/drawing/2017/decorative" val="1"/>
+              </a:ext>
+            </a:extLst>
+          </p:cNvPr>
+          <p:cNvSpPr>
+            <a:spLocks noGrp="1" noRot="1" noChangeAspect="1" noMove="1" noResize="1" noEditPoints="1" noAdjustHandles="1" noChangeArrowheads="1" noChangeShapeType="1" noTextEdit="1"/>
+          </p:cNvSpPr>
+          <p:nvPr>
+            <p:extLst>
+              <p:ext uri="{386F3935-93C4-4BCD-93E2-E3B085C9AB24}">
+                <p16:designElem xmlns:p16="http://schemas.microsoft.com/office/powerpoint/2015/main" val="1"/>
+              </p:ext>
+            </p:extLst>
+          </p:nvPr>
+        </p:nvSpPr>
+        <p:spPr>
+          <a:xfrm flipH="1">
+            <a:off x="7604080" y="6453143"/>
+            <a:ext cx="814903" cy="404857"/>
+          </a:xfrm>
+          <a:prstGeom prst="triangle">
+            <a:avLst/>
+          </a:prstGeom>
+          <a:solidFill>
+            <a:schemeClr val="accent1">
+              <a:alpha val="30000"/>
+            </a:schemeClr>
+          </a:solidFill>
+          <a:ln>
+            <a:noFill/>
+          </a:ln>
+        </p:spPr>
+        <p:style>
+          <a:lnRef idx="2">
+            <a:schemeClr val="accent1">
+              <a:shade val="50000"/>
+            </a:schemeClr>
+          </a:lnRef>
+          <a:fillRef idx="1">
+            <a:schemeClr val="accent1"/>
+          </a:fillRef>
+          <a:effectRef idx="0">
+            <a:schemeClr val="accent1"/>
+          </a:effectRef>
+          <a:fontRef idx="minor">
+            <a:schemeClr val="lt1"/>
+          </a:fontRef>
+        </p:style>
+        <p:txBody>
+          <a:bodyPr rtlCol="0" anchor="ctr"/>
+          <a:lstStyle/>
+          <a:p>
+            <a:pPr algn="ctr"/>
+            <a:endParaRPr lang="en-US"/>
+          </a:p>
+        </p:txBody>
+      </p:sp>
     </p:spTree>
     <p:extLst>
       <p:ext uri="{BB962C8B-B14F-4D97-AF65-F5344CB8AC3E}">
         <p14:creationId xmlns:p14="http://schemas.microsoft.com/office/powerpoint/2010/main" val="2367323108"/>
+      </p:ext>
+    </p:extLst>
+  </p:cSld>
+  <p:clrMapOvr>
+    <a:masterClrMapping/>
+  </p:clrMapOvr>
+</p:sld>
+</file>
+
+<file path=ppt/slides/slide21.xml><?xml version="1.0" encoding="utf-8"?>
+<p:sld xmlns:a="http://schemas.openxmlformats.org/drawingml/2006/main" xmlns:r="http://schemas.openxmlformats.org/officeDocument/2006/relationships" xmlns:p="http://schemas.openxmlformats.org/presentationml/2006/main">
+  <p:cSld>
+    <p:spTree>
+      <p:nvGrpSpPr>
+        <p:cNvPr id="1" name=""/>
+        <p:cNvGrpSpPr/>
+        <p:nvPr/>
+      </p:nvGrpSpPr>
+      <p:grpSpPr>
+        <a:xfrm>
+          <a:off x="0" y="0"/>
+          <a:ext cx="0" cy="0"/>
+          <a:chOff x="0" y="0"/>
+          <a:chExt cx="0" cy="0"/>
+        </a:xfrm>
+      </p:grpSpPr>
+      <p:pic>
+        <p:nvPicPr>
+          <p:cNvPr id="3" name="Picture 2">
+            <a:extLst>
+              <a:ext uri="{FF2B5EF4-FFF2-40B4-BE49-F238E27FC236}">
+                <a16:creationId xmlns:a16="http://schemas.microsoft.com/office/drawing/2014/main" id="{235E8BAA-EB79-E83B-C51B-C47A70BAB971}"/>
+              </a:ext>
+            </a:extLst>
+          </p:cNvPr>
+          <p:cNvPicPr>
+            <a:picLocks noChangeAspect="1"/>
+          </p:cNvPicPr>
+          <p:nvPr/>
+        </p:nvPicPr>
+        <p:blipFill>
+          <a:blip r:embed="rId2"/>
+          <a:stretch>
+            <a:fillRect/>
+          </a:stretch>
+        </p:blipFill>
+        <p:spPr>
+          <a:xfrm>
+            <a:off x="718387" y="294837"/>
+            <a:ext cx="10310397" cy="6268325"/>
+          </a:xfrm>
+          <a:prstGeom prst="rect">
+            <a:avLst/>
+          </a:prstGeom>
+        </p:spPr>
+      </p:pic>
+    </p:spTree>
+    <p:extLst>
+      <p:ext uri="{BB962C8B-B14F-4D97-AF65-F5344CB8AC3E}">
+        <p14:creationId xmlns:p14="http://schemas.microsoft.com/office/powerpoint/2010/main" val="3545949693"/>
+      </p:ext>
+    </p:extLst>
+  </p:cSld>
+  <p:clrMapOvr>
+    <a:masterClrMapping/>
+  </p:clrMapOvr>
+</p:sld>
+</file>
+
+<file path=ppt/slides/slide22.xml><?xml version="1.0" encoding="utf-8"?>
+<p:sld xmlns:a="http://schemas.openxmlformats.org/drawingml/2006/main" xmlns:r="http://schemas.openxmlformats.org/officeDocument/2006/relationships" xmlns:p="http://schemas.openxmlformats.org/presentationml/2006/main">
+  <p:cSld>
+    <p:spTree>
+      <p:nvGrpSpPr>
+        <p:cNvPr id="1" name=""/>
+        <p:cNvGrpSpPr/>
+        <p:nvPr/>
+      </p:nvGrpSpPr>
+      <p:grpSpPr>
+        <a:xfrm>
+          <a:off x="0" y="0"/>
+          <a:ext cx="0" cy="0"/>
+          <a:chOff x="0" y="0"/>
+          <a:chExt cx="0" cy="0"/>
+        </a:xfrm>
+      </p:grpSpPr>
+      <p:pic>
+        <p:nvPicPr>
+          <p:cNvPr id="3" name="Picture 2">
+            <a:extLst>
+              <a:ext uri="{FF2B5EF4-FFF2-40B4-BE49-F238E27FC236}">
+                <a16:creationId xmlns:a16="http://schemas.microsoft.com/office/drawing/2014/main" id="{85E3D9B1-DD1A-0FFF-BF2B-7F525446091C}"/>
+              </a:ext>
+            </a:extLst>
+          </p:cNvPr>
+          <p:cNvPicPr>
+            <a:picLocks noChangeAspect="1"/>
+          </p:cNvPicPr>
+          <p:nvPr/>
+        </p:nvPicPr>
+        <p:blipFill>
+          <a:blip r:embed="rId2"/>
+          <a:stretch>
+            <a:fillRect/>
+          </a:stretch>
+        </p:blipFill>
+        <p:spPr>
+          <a:xfrm>
+            <a:off x="651702" y="547285"/>
+            <a:ext cx="10888595" cy="5763429"/>
+          </a:xfrm>
+          <a:prstGeom prst="rect">
+            <a:avLst/>
+          </a:prstGeom>
+        </p:spPr>
+      </p:pic>
+    </p:spTree>
+    <p:extLst>
+      <p:ext uri="{BB962C8B-B14F-4D97-AF65-F5344CB8AC3E}">
+        <p14:creationId xmlns:p14="http://schemas.microsoft.com/office/powerpoint/2010/main" val="2811393011"/>
+      </p:ext>
+    </p:extLst>
+  </p:cSld>
+  <p:clrMapOvr>
+    <a:masterClrMapping/>
+  </p:clrMapOvr>
+</p:sld>
+</file>
+
+<file path=ppt/slides/slide23.xml><?xml version="1.0" encoding="utf-8"?>
+<p:sld xmlns:a="http://schemas.openxmlformats.org/drawingml/2006/main" xmlns:r="http://schemas.openxmlformats.org/officeDocument/2006/relationships" xmlns:p="http://schemas.openxmlformats.org/presentationml/2006/main">
+  <p:cSld>
+    <p:spTree>
+      <p:nvGrpSpPr>
+        <p:cNvPr id="1" name=""/>
+        <p:cNvGrpSpPr/>
+        <p:nvPr/>
+      </p:nvGrpSpPr>
+      <p:grpSpPr>
+        <a:xfrm>
+          <a:off x="0" y="0"/>
+          <a:ext cx="0" cy="0"/>
+          <a:chOff x="0" y="0"/>
+          <a:chExt cx="0" cy="0"/>
+        </a:xfrm>
+      </p:grpSpPr>
+      <p:pic>
+        <p:nvPicPr>
+          <p:cNvPr id="3" name="Picture 2">
+            <a:extLst>
+              <a:ext uri="{FF2B5EF4-FFF2-40B4-BE49-F238E27FC236}">
+                <a16:creationId xmlns:a16="http://schemas.microsoft.com/office/drawing/2014/main" id="{F5BB02AA-3387-286D-F961-E98F176D7237}"/>
+              </a:ext>
+            </a:extLst>
+          </p:cNvPr>
+          <p:cNvPicPr>
+            <a:picLocks noChangeAspect="1"/>
+          </p:cNvPicPr>
+          <p:nvPr/>
+        </p:nvPicPr>
+        <p:blipFill>
+          <a:blip r:embed="rId2"/>
+          <a:stretch>
+            <a:fillRect/>
+          </a:stretch>
+        </p:blipFill>
+        <p:spPr>
+          <a:xfrm>
+            <a:off x="2209257" y="432969"/>
+            <a:ext cx="7773485" cy="5992061"/>
+          </a:xfrm>
+          <a:prstGeom prst="rect">
+            <a:avLst/>
+          </a:prstGeom>
+        </p:spPr>
+      </p:pic>
+    </p:spTree>
+    <p:extLst>
+      <p:ext uri="{BB962C8B-B14F-4D97-AF65-F5344CB8AC3E}">
+        <p14:creationId xmlns:p14="http://schemas.microsoft.com/office/powerpoint/2010/main" val="4192539842"/>
+      </p:ext>
+    </p:extLst>
+  </p:cSld>
+  <p:clrMapOvr>
+    <a:masterClrMapping/>
+  </p:clrMapOvr>
+</p:sld>
+</file>
+
+<file path=ppt/slides/slide24.xml><?xml version="1.0" encoding="utf-8"?>
+<p:sld xmlns:a="http://schemas.openxmlformats.org/drawingml/2006/main" xmlns:r="http://schemas.openxmlformats.org/officeDocument/2006/relationships" xmlns:p="http://schemas.openxmlformats.org/presentationml/2006/main">
+  <p:cSld>
+    <p:bg>
+      <p:bgPr>
+        <a:solidFill>
+          <a:schemeClr val="bg1"/>
+        </a:solidFill>
+        <a:effectLst/>
+      </p:bgPr>
+    </p:bg>
+    <p:spTree>
+      <p:nvGrpSpPr>
+        <p:cNvPr id="1" name=""/>
+        <p:cNvGrpSpPr/>
+        <p:nvPr/>
+      </p:nvGrpSpPr>
+      <p:grpSpPr>
+        <a:xfrm>
+          <a:off x="0" y="0"/>
+          <a:ext cx="0" cy="0"/>
+          <a:chOff x="0" y="0"/>
+          <a:chExt cx="0" cy="0"/>
+        </a:xfrm>
+      </p:grpSpPr>
+      <p:pic>
+        <p:nvPicPr>
+          <p:cNvPr id="3" name="Picture 2">
+            <a:extLst>
+              <a:ext uri="{FF2B5EF4-FFF2-40B4-BE49-F238E27FC236}">
+                <a16:creationId xmlns:a16="http://schemas.microsoft.com/office/drawing/2014/main" id="{91B81D97-E15F-54C5-80A2-B238AD9DAC82}"/>
+              </a:ext>
+            </a:extLst>
+          </p:cNvPr>
+          <p:cNvPicPr>
+            <a:picLocks noChangeAspect="1"/>
+          </p:cNvPicPr>
+          <p:nvPr/>
+        </p:nvPicPr>
+        <p:blipFill>
+          <a:blip r:embed="rId2"/>
+          <a:stretch>
+            <a:fillRect/>
+          </a:stretch>
+        </p:blipFill>
+        <p:spPr>
+          <a:xfrm>
+            <a:off x="739206" y="643466"/>
+            <a:ext cx="10713588" cy="5571067"/>
+          </a:xfrm>
+          <a:prstGeom prst="rect">
+            <a:avLst/>
+          </a:prstGeom>
+        </p:spPr>
+      </p:pic>
+    </p:spTree>
+    <p:extLst>
+      <p:ext uri="{BB962C8B-B14F-4D97-AF65-F5344CB8AC3E}">
+        <p14:creationId xmlns:p14="http://schemas.microsoft.com/office/powerpoint/2010/main" val="2822777960"/>
+      </p:ext>
+    </p:extLst>
+  </p:cSld>
+  <p:clrMapOvr>
+    <a:masterClrMapping/>
+  </p:clrMapOvr>
+</p:sld>
+</file>
+
+<file path=ppt/slides/slide25.xml><?xml version="1.0" encoding="utf-8"?>
+<p:sld xmlns:a="http://schemas.openxmlformats.org/drawingml/2006/main" xmlns:r="http://schemas.openxmlformats.org/officeDocument/2006/relationships" xmlns:p="http://schemas.openxmlformats.org/presentationml/2006/main">
+  <p:cSld>
+    <p:spTree>
+      <p:nvGrpSpPr>
+        <p:cNvPr id="1" name=""/>
+        <p:cNvGrpSpPr/>
+        <p:nvPr/>
+      </p:nvGrpSpPr>
+      <p:grpSpPr>
+        <a:xfrm>
+          <a:off x="0" y="0"/>
+          <a:ext cx="0" cy="0"/>
+          <a:chOff x="0" y="0"/>
+          <a:chExt cx="0" cy="0"/>
+        </a:xfrm>
+      </p:grpSpPr>
+      <p:pic>
+        <p:nvPicPr>
+          <p:cNvPr id="3" name="Picture 2">
+            <a:extLst>
+              <a:ext uri="{FF2B5EF4-FFF2-40B4-BE49-F238E27FC236}">
+                <a16:creationId xmlns:a16="http://schemas.microsoft.com/office/drawing/2014/main" id="{A78B30E2-C61B-AD14-3208-760478CE0733}"/>
+              </a:ext>
+            </a:extLst>
+          </p:cNvPr>
+          <p:cNvPicPr>
+            <a:picLocks noChangeAspect="1"/>
+          </p:cNvPicPr>
+          <p:nvPr/>
+        </p:nvPicPr>
+        <p:blipFill>
+          <a:blip r:embed="rId2"/>
+          <a:stretch>
+            <a:fillRect/>
+          </a:stretch>
+        </p:blipFill>
+        <p:spPr>
+          <a:xfrm>
+            <a:off x="1332835" y="599680"/>
+            <a:ext cx="9526329" cy="5658640"/>
+          </a:xfrm>
+          <a:prstGeom prst="rect">
+            <a:avLst/>
+          </a:prstGeom>
+        </p:spPr>
+      </p:pic>
+    </p:spTree>
+    <p:extLst>
+      <p:ext uri="{BB962C8B-B14F-4D97-AF65-F5344CB8AC3E}">
+        <p14:creationId xmlns:p14="http://schemas.microsoft.com/office/powerpoint/2010/main" val="2575685479"/>
+      </p:ext>
+    </p:extLst>
+  </p:cSld>
+  <p:clrMapOvr>
+    <a:masterClrMapping/>
+  </p:clrMapOvr>
+</p:sld>
+</file>
+
+<file path=ppt/slides/slide26.xml><?xml version="1.0" encoding="utf-8"?>
+<p:sld xmlns:a="http://schemas.openxmlformats.org/drawingml/2006/main" xmlns:r="http://schemas.openxmlformats.org/officeDocument/2006/relationships" xmlns:p="http://schemas.openxmlformats.org/presentationml/2006/main">
+  <p:cSld>
+    <p:spTree>
+      <p:nvGrpSpPr>
+        <p:cNvPr id="1" name=""/>
+        <p:cNvGrpSpPr/>
+        <p:nvPr/>
+      </p:nvGrpSpPr>
+      <p:grpSpPr>
+        <a:xfrm>
+          <a:off x="0" y="0"/>
+          <a:ext cx="0" cy="0"/>
+          <a:chOff x="0" y="0"/>
+          <a:chExt cx="0" cy="0"/>
+        </a:xfrm>
+      </p:grpSpPr>
+      <p:pic>
+        <p:nvPicPr>
+          <p:cNvPr id="3" name="Picture 2">
+            <a:extLst>
+              <a:ext uri="{FF2B5EF4-FFF2-40B4-BE49-F238E27FC236}">
+                <a16:creationId xmlns:a16="http://schemas.microsoft.com/office/drawing/2014/main" id="{2BDB89E9-F6A1-DEB1-9338-E5DFCB5D5E28}"/>
+              </a:ext>
+            </a:extLst>
+          </p:cNvPr>
+          <p:cNvPicPr>
+            <a:picLocks noChangeAspect="1"/>
+          </p:cNvPicPr>
+          <p:nvPr/>
+        </p:nvPicPr>
+        <p:blipFill>
+          <a:blip r:embed="rId2"/>
+          <a:stretch>
+            <a:fillRect/>
+          </a:stretch>
+        </p:blipFill>
+        <p:spPr>
+          <a:xfrm>
+            <a:off x="556439" y="518706"/>
+            <a:ext cx="11079121" cy="5820587"/>
+          </a:xfrm>
+          <a:prstGeom prst="rect">
+            <a:avLst/>
+          </a:prstGeom>
+        </p:spPr>
+      </p:pic>
+    </p:spTree>
+    <p:extLst>
+      <p:ext uri="{BB962C8B-B14F-4D97-AF65-F5344CB8AC3E}">
+        <p14:creationId xmlns:p14="http://schemas.microsoft.com/office/powerpoint/2010/main" val="1078786204"/>
+      </p:ext>
+    </p:extLst>
+  </p:cSld>
+  <p:clrMapOvr>
+    <a:masterClrMapping/>
+  </p:clrMapOvr>
+</p:sld>
+</file>
+
+<file path=ppt/slides/slide27.xml><?xml version="1.0" encoding="utf-8"?>
+<p:sld xmlns:a="http://schemas.openxmlformats.org/drawingml/2006/main" xmlns:r="http://schemas.openxmlformats.org/officeDocument/2006/relationships" xmlns:p="http://schemas.openxmlformats.org/presentationml/2006/main">
+  <p:cSld>
+    <p:spTree>
+      <p:nvGrpSpPr>
+        <p:cNvPr id="1" name=""/>
+        <p:cNvGrpSpPr/>
+        <p:nvPr/>
+      </p:nvGrpSpPr>
+      <p:grpSpPr>
+        <a:xfrm>
+          <a:off x="0" y="0"/>
+          <a:ext cx="0" cy="0"/>
+          <a:chOff x="0" y="0"/>
+          <a:chExt cx="0" cy="0"/>
+        </a:xfrm>
+      </p:grpSpPr>
+      <p:pic>
+        <p:nvPicPr>
+          <p:cNvPr id="3" name="Picture 2">
+            <a:extLst>
+              <a:ext uri="{FF2B5EF4-FFF2-40B4-BE49-F238E27FC236}">
+                <a16:creationId xmlns:a16="http://schemas.microsoft.com/office/drawing/2014/main" id="{EDE31B4E-4892-F73E-35A4-BEEF5BC195CD}"/>
+              </a:ext>
+            </a:extLst>
+          </p:cNvPr>
+          <p:cNvPicPr>
+            <a:picLocks noChangeAspect="1"/>
+          </p:cNvPicPr>
+          <p:nvPr/>
+        </p:nvPicPr>
+        <p:blipFill>
+          <a:blip r:embed="rId2"/>
+          <a:stretch>
+            <a:fillRect/>
+          </a:stretch>
+        </p:blipFill>
+        <p:spPr>
+          <a:xfrm>
+            <a:off x="576861" y="485364"/>
+            <a:ext cx="10907647" cy="5887272"/>
+          </a:xfrm>
+          <a:prstGeom prst="rect">
+            <a:avLst/>
+          </a:prstGeom>
+        </p:spPr>
+      </p:pic>
+    </p:spTree>
+    <p:extLst>
+      <p:ext uri="{BB962C8B-B14F-4D97-AF65-F5344CB8AC3E}">
+        <p14:creationId xmlns:p14="http://schemas.microsoft.com/office/powerpoint/2010/main" val="1899656968"/>
+      </p:ext>
+    </p:extLst>
+  </p:cSld>
+  <p:clrMapOvr>
+    <a:masterClrMapping/>
+  </p:clrMapOvr>
+</p:sld>
+</file>
+
+<file path=ppt/slides/slide28.xml><?xml version="1.0" encoding="utf-8"?>
+<p:sld xmlns:a="http://schemas.openxmlformats.org/drawingml/2006/main" xmlns:r="http://schemas.openxmlformats.org/officeDocument/2006/relationships" xmlns:p="http://schemas.openxmlformats.org/presentationml/2006/main">
+  <p:cSld>
+    <p:spTree>
+      <p:nvGrpSpPr>
+        <p:cNvPr id="1" name=""/>
+        <p:cNvGrpSpPr/>
+        <p:nvPr/>
+      </p:nvGrpSpPr>
+      <p:grpSpPr>
+        <a:xfrm>
+          <a:off x="0" y="0"/>
+          <a:ext cx="0" cy="0"/>
+          <a:chOff x="0" y="0"/>
+          <a:chExt cx="0" cy="0"/>
+        </a:xfrm>
+      </p:grpSpPr>
+      <p:pic>
+        <p:nvPicPr>
+          <p:cNvPr id="3" name="Picture 2">
+            <a:extLst>
+              <a:ext uri="{FF2B5EF4-FFF2-40B4-BE49-F238E27FC236}">
+                <a16:creationId xmlns:a16="http://schemas.microsoft.com/office/drawing/2014/main" id="{7DBE980C-43FF-4135-633B-E965B4B8536D}"/>
+              </a:ext>
+            </a:extLst>
+          </p:cNvPr>
+          <p:cNvPicPr>
+            <a:picLocks noChangeAspect="1"/>
+          </p:cNvPicPr>
+          <p:nvPr/>
+        </p:nvPicPr>
+        <p:blipFill>
+          <a:blip r:embed="rId2"/>
+          <a:stretch>
+            <a:fillRect/>
+          </a:stretch>
+        </p:blipFill>
+        <p:spPr>
+          <a:xfrm>
+            <a:off x="766018" y="461548"/>
+            <a:ext cx="10659963" cy="5934903"/>
+          </a:xfrm>
+          <a:prstGeom prst="rect">
+            <a:avLst/>
+          </a:prstGeom>
+        </p:spPr>
+      </p:pic>
+    </p:spTree>
+    <p:extLst>
+      <p:ext uri="{BB962C8B-B14F-4D97-AF65-F5344CB8AC3E}">
+        <p14:creationId xmlns:p14="http://schemas.microsoft.com/office/powerpoint/2010/main" val="1036317807"/>
+      </p:ext>
+    </p:extLst>
+  </p:cSld>
+  <p:clrMapOvr>
+    <a:masterClrMapping/>
+  </p:clrMapOvr>
+</p:sld>
+</file>
+
+<file path=ppt/slides/slide29.xml><?xml version="1.0" encoding="utf-8"?>
+<p:sld xmlns:a="http://schemas.openxmlformats.org/drawingml/2006/main" xmlns:r="http://schemas.openxmlformats.org/officeDocument/2006/relationships" xmlns:p="http://schemas.openxmlformats.org/presentationml/2006/main">
+  <p:cSld>
+    <p:spTree>
+      <p:nvGrpSpPr>
+        <p:cNvPr id="1" name=""/>
+        <p:cNvGrpSpPr/>
+        <p:nvPr/>
+      </p:nvGrpSpPr>
+      <p:grpSpPr>
+        <a:xfrm>
+          <a:off x="0" y="0"/>
+          <a:ext cx="0" cy="0"/>
+          <a:chOff x="0" y="0"/>
+          <a:chExt cx="0" cy="0"/>
+        </a:xfrm>
+      </p:grpSpPr>
+      <p:pic>
+        <p:nvPicPr>
+          <p:cNvPr id="3" name="Picture 2">
+            <a:extLst>
+              <a:ext uri="{FF2B5EF4-FFF2-40B4-BE49-F238E27FC236}">
+                <a16:creationId xmlns:a16="http://schemas.microsoft.com/office/drawing/2014/main" id="{78B5D3BD-400A-46C8-A1FC-3568D727FE1B}"/>
+              </a:ext>
+            </a:extLst>
+          </p:cNvPr>
+          <p:cNvPicPr>
+            <a:picLocks noChangeAspect="1"/>
+          </p:cNvPicPr>
+          <p:nvPr/>
+        </p:nvPicPr>
+        <p:blipFill>
+          <a:blip r:embed="rId2"/>
+          <a:stretch>
+            <a:fillRect/>
+          </a:stretch>
+        </p:blipFill>
+        <p:spPr>
+          <a:xfrm>
+            <a:off x="599308" y="899759"/>
+            <a:ext cx="10840023" cy="5058481"/>
+          </a:xfrm>
+          <a:prstGeom prst="rect">
+            <a:avLst/>
+          </a:prstGeom>
+        </p:spPr>
+      </p:pic>
+    </p:spTree>
+    <p:extLst>
+      <p:ext uri="{BB962C8B-B14F-4D97-AF65-F5344CB8AC3E}">
+        <p14:creationId xmlns:p14="http://schemas.microsoft.com/office/powerpoint/2010/main" val="3660978971"/>
       </p:ext>
     </p:extLst>
   </p:cSld>
